--- a/finale/AgentHack-2026-Workforce-to-Workflow.pptx
+++ b/finale/AgentHack-2026-Workforce-to-Workflow.pptx
@@ -15738,7 +15738,7 @@
                   <a:schemeClr val="bg1"/>
                 </a:solidFill>
               </a:rPr>
-              <a:t>Supplier invoice → matching + variance agents (read S/4 over MCP, read-only) — LIVE</a:t>
+              <a:t>Supplier invoice → matching · variance · posting-prep — all THREE agents LIVE on real SAP over MCP (read-only)</a:t>
             </a:r>
             <a:br>
               <a:rPr lang="en-US" sz="1800" b="0" dirty="0">
